--- a/docs/onboarding/01-workspace.pptx
+++ b/docs/onboarding/01-workspace.pptx
@@ -1640,7 +1640,7 @@
                 <a:ea typeface="Arial" pitchFamily="34" charset="-122"/>
                 <a:cs typeface="Arial" pitchFamily="34" charset="-120"/>
               </a:rPr>
-              <a:t>TRADE-IMPORTS-ANIMALS ONBOARDING</a:t>
+              <a:t>TRADE-IMPORTS WORKSPACE ONBOARDING</a:t>
             </a:r>
             <a:endParaRPr lang="en-US" sz="1400" dirty="0"/>
           </a:p>
@@ -1952,7 +1952,7 @@
                 <a:ea typeface="Arial" pitchFamily="34" charset="-122"/>
                 <a:cs typeface="Arial" pitchFamily="34" charset="-120"/>
               </a:rPr>
-              <a:t>A local workspace that clones eight independent GitHub repos side by side and adds shared tooling on top.</a:t>
+              <a:t>A local workspace that clones the trade-imports repos side by side and adds shared tooling on top.</a:t>
             </a:r>
             <a:endParaRPr lang="en-US" sz="1600" dirty="0"/>
           </a:p>
@@ -1989,7 +1989,7 @@
                 <a:ea typeface="Arial" pitchFamily="34" charset="-122"/>
                 <a:cs typeface="Arial" pitchFamily="34" charset="-120"/>
               </a:rPr>
-              <a:t>The workspace doesn't own them — it sits alongside and lets you work across all eight at once.</a:t>
+              <a:t>The workspace doesn't own them — it sits alongside and lets you work across all of them at once.</a:t>
             </a:r>
             <a:endParaRPr lang="en-US" sz="1600" dirty="0"/>
           </a:p>
@@ -2109,7 +2109,7 @@
                 <a:ea typeface="Arial" pitchFamily="34" charset="-122"/>
                 <a:cs typeface="Arial" pitchFamily="34" charset="-120"/>
               </a:rPr>
-              <a:t>8 independent repos</a:t>
+              <a:t>Independent repos</a:t>
             </a:r>
             <a:endParaRPr lang="en-US" sz="1200" dirty="0"/>
           </a:p>
@@ -2879,7 +2879,7 @@
                 <a:ea typeface="Arial" pitchFamily="34" charset="-122"/>
                 <a:cs typeface="Arial" pitchFamily="34" charset="-120"/>
               </a:rPr>
-              <a:t>trade-imports-animals onboarding</a:t>
+              <a:t>trade-imports workspace onboarding</a:t>
             </a:r>
             <a:endParaRPr lang="en-US" sz="900" dirty="0"/>
           </a:p>
@@ -3443,7 +3443,7 @@
                 <a:ea typeface="Arial" pitchFamily="34" charset="-122"/>
                 <a:cs typeface="Arial" pitchFamily="34" charset="-120"/>
               </a:rPr>
-              <a:t>All eight repos in view</a:t>
+              <a:t>Every repo in view</a:t>
             </a:r>
             <a:endParaRPr lang="en-US" sz="1400" dirty="0"/>
           </a:p>
@@ -3563,7 +3563,7 @@
                 <a:ea typeface="Arial" pitchFamily="34" charset="-122"/>
                 <a:cs typeface="Arial" pitchFamily="34" charset="-120"/>
               </a:rPr>
-              <a:t>trade-imports-animals onboarding</a:t>
+              <a:t>trade-imports workspace onboarding</a:t>
             </a:r>
             <a:endParaRPr lang="en-US" sz="900" dirty="0"/>
           </a:p>
@@ -4419,7 +4419,7 @@
                 <a:ea typeface="Arial" pitchFamily="34" charset="-122"/>
                 <a:cs typeface="Arial" pitchFamily="34" charset="-120"/>
               </a:rPr>
-              <a:t>One compose stack stands up all eight services together.</a:t>
+              <a:t>One compose stack stands up every service together.</a:t>
             </a:r>
             <a:endParaRPr lang="en-US" sz="1300" dirty="0"/>
           </a:p>
@@ -4620,7 +4620,7 @@
                 <a:ea typeface="Arial" pitchFamily="34" charset="-122"/>
                 <a:cs typeface="Arial" pitchFamily="34" charset="-120"/>
               </a:rPr>
-              <a:t>trade-imports-animals onboarding</a:t>
+              <a:t>trade-imports workspace onboarding</a:t>
             </a:r>
             <a:endParaRPr lang="en-US" sz="900" dirty="0"/>
           </a:p>
@@ -5981,7 +5981,7 @@
                 <a:ea typeface="Arial" pitchFamily="34" charset="-122"/>
                 <a:cs typeface="Arial" pitchFamily="34" charset="-120"/>
               </a:rPr>
-              <a:t> — so the whole service runs end-to-end on your machine. Full roles and the live repo map live in CLAUDE.md.</a:t>
+              <a:t> — so the whole stack runs end-to-end on your machine. Full roles and the live repo map live in CLAUDE.md.</a:t>
             </a:r>
             <a:endParaRPr lang="en-US" sz="1300" dirty="0"/>
           </a:p>
@@ -6020,7 +6020,7 @@
                 <a:ea typeface="Arial" pitchFamily="34" charset="-122"/>
                 <a:cs typeface="Arial" pitchFamily="34" charset="-120"/>
               </a:rPr>
-              <a:t>trade-imports-animals onboarding</a:t>
+              <a:t>trade-imports workspace onboarding</a:t>
             </a:r>
             <a:endParaRPr lang="en-US" sz="900" dirty="0"/>
           </a:p>
@@ -6291,7 +6291,7 @@
                 <a:ea typeface="Arial" pitchFamily="34" charset="-122"/>
                 <a:cs typeface="Arial" pitchFamily="34" charset="-120"/>
               </a:rPr>
-              <a:t>the eight service repos</a:t>
+              <a:t>the service repos</a:t>
             </a:r>
             <a:endParaRPr lang="en-US" sz="1400" dirty="0"/>
           </a:p>
@@ -6942,7 +6942,7 @@
                 <a:ea typeface="Arial" pitchFamily="34" charset="-122"/>
                 <a:cs typeface="Arial" pitchFamily="34" charset="-120"/>
               </a:rPr>
-              <a:t>trade-imports-animals onboarding</a:t>
+              <a:t>trade-imports workspace onboarding</a:t>
             </a:r>
             <a:endParaRPr lang="en-US" sz="900" dirty="0"/>
           </a:p>
@@ -7563,7 +7563,7 @@
                 <a:ea typeface="Arial" pitchFamily="34" charset="-122"/>
                 <a:cs typeface="Arial" pitchFamily="34" charset="-120"/>
               </a:rPr>
-              <a:t>trade-imports-animals onboarding</a:t>
+              <a:t>trade-imports workspace onboarding</a:t>
             </a:r>
             <a:endParaRPr lang="en-US" sz="900" dirty="0"/>
           </a:p>
@@ -7771,7 +7771,7 @@
                 <a:ea typeface="Arial" pitchFamily="34" charset="-122"/>
                 <a:cs typeface="Arial" pitchFamily="34" charset="-120"/>
               </a:rPr>
-              <a:t>Can you actually build and run all eight services? The stack is driven by the scripts under scripts/stack/ — the make docker-* targets are just thin wrappers around them.</a:t>
+              <a:t>Can you actually build and run the whole stack? The stack is driven by the scripts under scripts/stack/ — the make docker-* targets are just thin wrappers around them.</a:t>
             </a:r>
             <a:endParaRPr lang="en-US" sz="1500" dirty="0"/>
           </a:p>
@@ -7928,7 +7928,7 @@
                 <a:ea typeface="Arial" pitchFamily="34" charset="-122"/>
                 <a:cs typeface="Arial" pitchFamily="34" charset="-120"/>
               </a:rPr>
-              <a:t>clone all eight repos</a:t>
+              <a:t>clone every repo</a:t>
             </a:r>
             <a:endParaRPr lang="en-US" sz="1100" dirty="0"/>
           </a:p>
@@ -8515,7 +8515,7 @@
                 <a:ea typeface="Courier New" pitchFamily="34" charset="-122"/>
                 <a:cs typeface="Courier New" pitchFamily="34" charset="-120"/>
               </a:rPr>
-              <a:t>npm run test:local</a:t>
+              <a:t>npm run test:docker-compose</a:t>
             </a:r>
             <a:endParaRPr lang="en-US" sz="1100" dirty="0"/>
           </a:p>
@@ -8607,7 +8607,7 @@
                 <a:ea typeface="Courier New" pitchFamily="34" charset="-122"/>
                 <a:cs typeface="Courier New" pitchFamily="34" charset="-120"/>
               </a:rPr>
-              <a:t>docker compose -p trade-imports-animals logs -f</a:t>
+              <a:t>docker compose -p trade-imports logs -f</a:t>
             </a:r>
             <a:pPr indent="0" marL="0">
               <a:buNone/>
@@ -8702,7 +8702,7 @@
                 <a:ea typeface="Arial" pitchFamily="34" charset="-122"/>
                 <a:cs typeface="Arial" pitchFamily="34" charset="-120"/>
               </a:rPr>
-              <a:t>trade-imports-animals onboarding</a:t>
+              <a:t>trade-imports workspace onboarding</a:t>
             </a:r>
             <a:endParaRPr lang="en-US" sz="900" dirty="0"/>
           </a:p>
@@ -9028,7 +9028,7 @@
                 <a:ea typeface="Arial" pitchFamily="34" charset="-122"/>
                 <a:cs typeface="Arial" pitchFamily="34" charset="-120"/>
               </a:rPr>
-              <a:t>Clone to ~/git/defra/trade-imports-animals-workspace (symlink if elsewhere), then make setup &amp;&amp; make install.</a:t>
+              <a:t>Clone to ~/git/defra/trade-imports-workspace (symlink if elsewhere), then make setup &amp;&amp; make install.</a:t>
             </a:r>
             <a:endParaRPr lang="en-US" sz="1300" dirty="0"/>
           </a:p>
@@ -9342,7 +9342,7 @@
                 <a:ea typeface="Arial" pitchFamily="34" charset="-122"/>
                 <a:cs typeface="Arial" pitchFamily="34" charset="-120"/>
               </a:rPr>
-              <a:t>npm run test:local in the tests repo. Skim make help and CLAUDE.md while it runs.</a:t>
+              <a:t>npm run test:docker-compose in the tests repo. Skim make help and CLAUDE.md while it runs.</a:t>
             </a:r>
             <a:endParaRPr lang="en-US" sz="1300" dirty="0"/>
           </a:p>
